--- a/docs/examples/en_marketing.pptx
+++ b/docs/examples/en_marketing.pptx
@@ -990,7 +990,7 @@
         <p:spPr>
           <a:xfrm>
             <a:off x="381000" y="1035050"/>
-            <a:ext cx="957015" cy="215900"/>
+            <a:ext cx="1013217" cy="215900"/>
           </a:xfrm>
           <a:prstGeom prst="roundRect">
             <a:avLst>
@@ -1038,7 +1038,7 @@
         <p:spPr>
           <a:xfrm>
             <a:off x="610870" y="1035050"/>
-            <a:ext cx="727145" cy="215900"/>
+            <a:ext cx="783347" cy="215900"/>
           </a:xfrm>
           <a:prstGeom prst="rect">
             <a:avLst/>
@@ -1047,7 +1047,7 @@
           <a:ln/>
         </p:spPr>
         <p:txBody>
-          <a:bodyPr wrap="square" lIns="0" tIns="0" rIns="0" bIns="0" rtlCol="0" anchor="ctr"/>
+          <a:bodyPr wrap="none" lIns="0" tIns="0" rIns="0" bIns="0" rtlCol="0" anchor="ctr"/>
           <a:lstStyle/>
           <a:p>
             <a:pPr algn="l" indent="0" marL="0">
@@ -1079,8 +1079,8 @@
         </p:nvSpPr>
         <p:spPr>
           <a:xfrm>
-            <a:off x="1388815" y="1035050"/>
-            <a:ext cx="1705360" cy="215900"/>
+            <a:off x="1445017" y="1035050"/>
+            <a:ext cx="1806462" cy="215900"/>
           </a:xfrm>
           <a:prstGeom prst="roundRect">
             <a:avLst>
@@ -1111,7 +1111,7 @@
         </p:blipFill>
         <p:spPr>
           <a:xfrm>
-            <a:off x="1468825" y="1089025"/>
+            <a:off x="1525027" y="1089025"/>
             <a:ext cx="107950" cy="107950"/>
           </a:xfrm>
           <a:prstGeom prst="rect">
@@ -1127,8 +1127,8 @@
         </p:nvSpPr>
         <p:spPr>
           <a:xfrm>
-            <a:off x="1618685" y="1035050"/>
-            <a:ext cx="1475490" cy="215900"/>
+            <a:off x="1674887" y="1035050"/>
+            <a:ext cx="1576592" cy="215900"/>
           </a:xfrm>
           <a:prstGeom prst="rect">
             <a:avLst/>
@@ -1137,7 +1137,7 @@
           <a:ln/>
         </p:spPr>
         <p:txBody>
-          <a:bodyPr wrap="square" lIns="0" tIns="0" rIns="0" bIns="0" rtlCol="0" anchor="ctr"/>
+          <a:bodyPr wrap="none" lIns="0" tIns="0" rIns="0" bIns="0" rtlCol="0" anchor="ctr"/>
           <a:lstStyle/>
           <a:p>
             <a:pPr algn="l" indent="0" marL="0">
@@ -1179,8 +1179,8 @@
         </p:blipFill>
         <p:spPr>
           <a:xfrm>
-            <a:off x="1388815" y="1035050"/>
-            <a:ext cx="1705360" cy="215900"/>
+            <a:off x="1445017" y="1035050"/>
+            <a:ext cx="1806462" cy="215900"/>
           </a:xfrm>
           <a:prstGeom prst="rect">
             <a:avLst/>
@@ -1195,8 +1195,8 @@
         </p:nvSpPr>
         <p:spPr>
           <a:xfrm>
-            <a:off x="3144975" y="1035050"/>
-            <a:ext cx="1508618" cy="215900"/>
+            <a:off x="3302279" y="1035050"/>
+            <a:ext cx="1597916" cy="215900"/>
           </a:xfrm>
           <a:prstGeom prst="roundRect">
             <a:avLst>
@@ -1227,7 +1227,7 @@
         </p:blipFill>
         <p:spPr>
           <a:xfrm>
-            <a:off x="3224985" y="1089025"/>
+            <a:off x="3382289" y="1089025"/>
             <a:ext cx="107950" cy="107950"/>
           </a:xfrm>
           <a:prstGeom prst="rect">
@@ -1243,8 +1243,8 @@
         </p:nvSpPr>
         <p:spPr>
           <a:xfrm>
-            <a:off x="3374845" y="1035050"/>
-            <a:ext cx="1278748" cy="215900"/>
+            <a:off x="3532149" y="1035050"/>
+            <a:ext cx="1368046" cy="215900"/>
           </a:xfrm>
           <a:prstGeom prst="rect">
             <a:avLst/>
@@ -1253,7 +1253,7 @@
           <a:ln/>
         </p:spPr>
         <p:txBody>
-          <a:bodyPr wrap="square" lIns="0" tIns="0" rIns="0" bIns="0" rtlCol="0" anchor="ctr"/>
+          <a:bodyPr wrap="none" lIns="0" tIns="0" rIns="0" bIns="0" rtlCol="0" anchor="ctr"/>
           <a:lstStyle/>
           <a:p>
             <a:pPr algn="l" indent="0" marL="0">
@@ -1295,8 +1295,8 @@
         </p:blipFill>
         <p:spPr>
           <a:xfrm>
-            <a:off x="3144975" y="1035050"/>
-            <a:ext cx="1508618" cy="215900"/>
+            <a:off x="3302279" y="1035050"/>
+            <a:ext cx="1597916" cy="215900"/>
           </a:xfrm>
           <a:prstGeom prst="rect">
             <a:avLst/>
@@ -1311,8 +1311,8 @@
         </p:nvSpPr>
         <p:spPr>
           <a:xfrm>
-            <a:off x="4704393" y="1035050"/>
-            <a:ext cx="843995" cy="215900"/>
+            <a:off x="4950995" y="1035050"/>
+            <a:ext cx="893416" cy="215900"/>
           </a:xfrm>
           <a:prstGeom prst="roundRect">
             <a:avLst>
@@ -1343,7 +1343,7 @@
         </p:blipFill>
         <p:spPr>
           <a:xfrm>
-            <a:off x="4784403" y="1089025"/>
+            <a:off x="5031005" y="1089025"/>
             <a:ext cx="107950" cy="107950"/>
           </a:xfrm>
           <a:prstGeom prst="rect">
@@ -1359,8 +1359,8 @@
         </p:nvSpPr>
         <p:spPr>
           <a:xfrm>
-            <a:off x="4934263" y="1035050"/>
-            <a:ext cx="614125" cy="215900"/>
+            <a:off x="5180865" y="1035050"/>
+            <a:ext cx="663546" cy="215900"/>
           </a:xfrm>
           <a:prstGeom prst="rect">
             <a:avLst/>
@@ -1369,7 +1369,7 @@
           <a:ln/>
         </p:spPr>
         <p:txBody>
-          <a:bodyPr wrap="square" lIns="0" tIns="0" rIns="0" bIns="0" rtlCol="0" anchor="ctr"/>
+          <a:bodyPr wrap="none" lIns="0" tIns="0" rIns="0" bIns="0" rtlCol="0" anchor="ctr"/>
           <a:lstStyle/>
           <a:p>
             <a:pPr algn="l" indent="0" marL="0">
